--- a/Hégémonie/storyboard/Le_Service_du_soir.pptx
+++ b/Hégémonie/storyboard/Le_Service_du_soir.pptx
@@ -527,6 +527,19 @@
           <a:p>
             <a:r>
               <a:rPr sz="1400"/>
+              <a:t>♪ MUSIQUE : playlist de 10 pistes dans l'ordre, sur ton téléphone ou un second onglet. Tu lances toujours 2 à 4 secondes AVANT de parler. Volume assez bas pour qu'on parle normalement par-dessus.</a:t>
+            </a:r>
+          </a:p>
+          <a:p>
+            <a:r>
+              <a:rPr sz="1400"/>
+              <a:t>Deux moments sans musique du tout : la négociation avec les marmottes une fois entamée, et les 4 minutes de silence de l'acte III.</a:t>
+            </a:r>
+          </a:p>
+          <a:p/>
+          <a:p>
+            <a:r>
+              <a:rPr sz="1400"/>
               <a:t>Rappel de ton : personne ne dit jamais « on est dans une baleine ». Les habitants disent « on habite ici ».</a:t>
             </a:r>
           </a:p>
@@ -611,6 +624,31 @@
           <a:p>
             <a:r>
               <a:rPr sz="1400"/>
+              <a:t>♪ MUSIQUE : Austin Wintory — Apotheosis (Journey)</a:t>
+            </a:r>
+          </a:p>
+          <a:p>
+            <a:r>
+              <a:rPr sz="1400"/>
+              <a:t>   Section : ~0:30 à la fin (~3:40)</a:t>
+            </a:r>
+          </a:p>
+          <a:p>
+            <a:r>
+              <a:rPr sz="1400"/>
+              <a:t>   Fichier : non embarqué</a:t>
+            </a:r>
+          </a:p>
+          <a:p>
+            <a:r>
+              <a:rPr sz="1400"/>
+              <a:t>   Départ  : ATTENTION : les 4 minutes de silence se jouent SANS musique. Tu lances quand la minuterie sonne.</a:t>
+            </a:r>
+          </a:p>
+          <a:p/>
+          <a:p>
+            <a:r>
+              <a:rPr sz="1400"/>
               <a:t>--- À LIRE ---</a:t>
             </a:r>
           </a:p>
@@ -739,6 +777,31 @@
           <a:p>
             <a:r>
               <a:rPr sz="1400"/>
+              <a:t>♪ MUSIQUE : Ólafur Arnalds — Near Light (Living Room Songs)</a:t>
+            </a:r>
+          </a:p>
+          <a:p>
+            <a:r>
+              <a:rPr sz="1400"/>
+              <a:t>   Section : intégral, ~3:10</a:t>
+            </a:r>
+          </a:p>
+          <a:p>
+            <a:r>
+              <a:rPr sz="1400"/>
+              <a:t>   Fichier : non embarqué</a:t>
+            </a:r>
+          </a:p>
+          <a:p>
+            <a:r>
+              <a:rPr sz="1400"/>
+              <a:t>   Départ  : Sur la dernière image. Laisse-la FINIR avant de poser la question à Bumbur.</a:t>
+            </a:r>
+          </a:p>
+          <a:p/>
+          <a:p>
+            <a:r>
+              <a:rPr sz="1400"/>
               <a:t>--- À LIRE ---</a:t>
             </a:r>
           </a:p>
@@ -932,6 +995,31 @@
           <a:p>
             <a:r>
               <a:rPr sz="1400"/>
+              <a:t>♪ MUSIQUE : Nils Frahm — Ambre (Felt)</a:t>
+            </a:r>
+          </a:p>
+          <a:p>
+            <a:r>
+              <a:rPr sz="1400"/>
+              <a:t>   Section : intégral, ~4 min</a:t>
+            </a:r>
+          </a:p>
+          <a:p>
+            <a:r>
+              <a:rPr sz="1400"/>
+              <a:t>   Fichier : non embarqué</a:t>
+            </a:r>
+          </a:p>
+          <a:p>
+            <a:r>
+              <a:rPr sz="1400"/>
+              <a:t>   Départ  : Avant ta première phrase. COUPE NET quand la femelle décolle.</a:t>
+            </a:r>
+          </a:p>
+          <a:p/>
+          <a:p>
+            <a:r>
+              <a:rPr sz="1400"/>
               <a:t>--- À LIRE ---</a:t>
             </a:r>
           </a:p>
@@ -1060,6 +1148,31 @@
           <a:p>
             <a:r>
               <a:rPr sz="1400"/>
+              <a:t>♪ MUSIQUE : Jóhann Jóhannsson — Flight From the City (Orphée)</a:t>
+            </a:r>
+          </a:p>
+          <a:p>
+            <a:r>
+              <a:rPr sz="1400"/>
+              <a:t>   Section : ~0:00 à ~2:30, piano seul</a:t>
+            </a:r>
+          </a:p>
+          <a:p>
+            <a:r>
+              <a:rPr sz="1400"/>
+              <a:t>   Fichier : non embarqué</a:t>
+            </a:r>
+          </a:p>
+          <a:p>
+            <a:r>
+              <a:rPr sz="1400"/>
+              <a:t>   Départ  : Sur « La femelle ne touche plus le sol. » Pas avant.</a:t>
+            </a:r>
+          </a:p>
+          <a:p/>
+          <a:p>
+            <a:r>
+              <a:rPr sz="1400"/>
               <a:t>--- À LIRE ---</a:t>
             </a:r>
           </a:p>
@@ -1188,6 +1301,31 @@
           <a:p>
             <a:r>
               <a:rPr sz="1400"/>
+              <a:t>♪ MUSIQUE : Brian Eno — An Ending (Ascent) (Apollo)</a:t>
+            </a:r>
+          </a:p>
+          <a:p>
+            <a:r>
+              <a:rPr sz="1400"/>
+              <a:t>   Section : intégral, ~4:25</a:t>
+            </a:r>
+          </a:p>
+          <a:p>
+            <a:r>
+              <a:rPr sz="1400"/>
+              <a:t>   Fichier : non embarqué</a:t>
+            </a:r>
+          </a:p>
+          <a:p>
+            <a:r>
+              <a:rPr sz="1400"/>
+              <a:t>   Départ  : Sur « Une ombre passe sous la coque. » LAISSE-LA FINIR dans le noir, ne parle pas dessus.</a:t>
+            </a:r>
+          </a:p>
+          <a:p/>
+          <a:p>
+            <a:r>
+              <a:rPr sz="1400"/>
               <a:t>--- À LIRE ---</a:t>
             </a:r>
           </a:p>
@@ -1316,6 +1454,31 @@
           <a:p>
             <a:r>
               <a:rPr sz="1400"/>
+              <a:t>♪ MUSIQUE : Nils Frahm — Says (Spaces)</a:t>
+            </a:r>
+          </a:p>
+          <a:p>
+            <a:r>
+              <a:rPr sz="1400"/>
+              <a:t>   Section : ~0:00 à ~3:30 (jusqu'à ~6:00 si tu veux la montée)</a:t>
+            </a:r>
+          </a:p>
+          <a:p>
+            <a:r>
+              <a:rPr sz="1400"/>
+              <a:t>   Fichier : non embarqué</a:t>
+            </a:r>
+          </a:p>
+          <a:p>
+            <a:r>
+              <a:rPr sz="1400"/>
+              <a:t>   Départ  : Juste avant « Vous vous attendiez à du noir. » Laisse respirer plus longtemps qu'ailleurs.</a:t>
+            </a:r>
+          </a:p>
+          <a:p/>
+          <a:p>
+            <a:r>
+              <a:rPr sz="1400"/>
               <a:t>--- À LIRE ---</a:t>
             </a:r>
           </a:p>
@@ -1444,6 +1607,31 @@
           <a:p>
             <a:r>
               <a:rPr sz="1400"/>
+              <a:t>♪ MUSIQUE : Bonobo — Days to Come (album Days to Come)</a:t>
+            </a:r>
+          </a:p>
+          <a:p>
+            <a:r>
+              <a:rPr sz="1400"/>
+              <a:t>   Section : intégral, ~4:00</a:t>
+            </a:r>
+          </a:p>
+          <a:p>
+            <a:r>
+              <a:rPr sz="1400"/>
+              <a:t>   Fichier : non embarqué</a:t>
+            </a:r>
+          </a:p>
+          <a:p>
+            <a:r>
+              <a:rPr sz="1400"/>
+              <a:t>   Départ  : Dès le quartier commerçant. BAISSE DE MOITIÉ quand Bumbur fait son signe.</a:t>
+            </a:r>
+          </a:p>
+          <a:p/>
+          <a:p>
+            <a:r>
+              <a:rPr sz="1400"/>
               <a:t>--- À LIRE ---</a:t>
             </a:r>
           </a:p>
@@ -1584,6 +1772,31 @@
           <a:p>
             <a:r>
               <a:rPr sz="1400"/>
+              <a:t>♪ MUSIQUE : Jóhann Jóhannsson — The Cause of Labour Is the Hope of the World (The Miners' Hymns)</a:t>
+            </a:r>
+          </a:p>
+          <a:p>
+            <a:r>
+              <a:rPr sz="1400"/>
+              <a:t>   Section : intégral ~6 min, ou les 3 premières</a:t>
+            </a:r>
+          </a:p>
+          <a:p>
+            <a:r>
+              <a:rPr sz="1400"/>
+              <a:t>   Fichier : non embarqué</a:t>
+            </a:r>
+          </a:p>
+          <a:p>
+            <a:r>
+              <a:rPr sz="1400"/>
+              <a:t>   Départ  : En entrant dans la salle des roues. Coupe quand la négociation commence vraiment.</a:t>
+            </a:r>
+          </a:p>
+          <a:p/>
+          <a:p>
+            <a:r>
+              <a:rPr sz="1400"/>
               <a:t>--- À LIRE ---</a:t>
             </a:r>
           </a:p>
@@ -1712,6 +1925,31 @@
           <a:p>
             <a:r>
               <a:rPr sz="1400"/>
+              <a:t>♪ MUSIQUE : Max Richter — On the Nature of Daylight (The Blue Notebooks)</a:t>
+            </a:r>
+          </a:p>
+          <a:p>
+            <a:r>
+              <a:rPr sz="1400"/>
+              <a:t>   Section : intégral ~6:10, ou ~0:00 à ~3:30</a:t>
+            </a:r>
+          </a:p>
+          <a:p>
+            <a:r>
+              <a:rPr sz="1400"/>
+              <a:t>   Fichier : non embarqué</a:t>
+            </a:r>
+          </a:p>
+          <a:p>
+            <a:r>
+              <a:rPr sz="1400"/>
+              <a:t>   Départ  : Au moment où tu avances le marqueur d'une zone. Sans commentaire.</a:t>
+            </a:r>
+          </a:p>
+          <a:p/>
+          <a:p>
+            <a:r>
+              <a:rPr sz="1400"/>
               <a:t>--- À LIRE ---</a:t>
             </a:r>
           </a:p>
@@ -1834,6 +2072,31 @@
             <a:r>
               <a:rPr sz="1400"/>
               <a:t>QUAND : ACTE II — quand la zone 5 tombe. LA scène centrale.</a:t>
+            </a:r>
+          </a:p>
+          <a:p/>
+          <a:p>
+            <a:r>
+              <a:rPr sz="1400"/>
+              <a:t>♪ MUSIQUE : Jóhann Jóhannsson — The Sun's Gone Dim and the Sky's Turned Black (IBM 1401)</a:t>
+            </a:r>
+          </a:p>
+          <a:p>
+            <a:r>
+              <a:rPr sz="1400"/>
+              <a:t>   Section : ~0:00 à ~2:40</a:t>
+            </a:r>
+          </a:p>
+          <a:p>
+            <a:r>
+              <a:rPr sz="1400"/>
+              <a:t>   Fichier : non embarqué</a:t>
+            </a:r>
+          </a:p>
+          <a:p>
+            <a:r>
+              <a:rPr sz="1400"/>
+              <a:t>   Départ  : Quand Pagure annonce l'ordre du jour. COUPE BRUTALEMENT si un joueur nomme la cathédrale.</a:t>
             </a:r>
           </a:p>
           <a:p/>

--- a/Hégémonie/storyboard/Le_Service_du_soir.pptx
+++ b/Hégémonie/storyboard/Le_Service_du_soir.pptx
@@ -527,7 +527,13 @@
           <a:p>
             <a:r>
               <a:rPr sz="1400"/>
-              <a:t>♪ MUSIQUE : playlist de 10 pistes dans l'ordre, sur ton téléphone ou un second onglet. Tu lances toujours 2 à 4 secondes AVANT de parler. Volume assez bas pour qu'on parle normalement par-dessus.</a:t>
+              <a:t>♪ MUSIQUE : playlist de 30 pistes dans l'ordre, sur ton téléphone ou un second onglet. Tu lances toujours 2 à 4 secondes AVANT de parler, volume assez bas pour qu'on parle normalement par-dessus.</a:t>
+            </a:r>
+          </a:p>
+          <a:p>
+            <a:r>
+              <a:rPr sz="1400"/>
+              <a:t>Trois pistes par scène, à enchaîner dans l'ordre : ~10 à 15 min de musique par scène, environ 2 h pour la séance.</a:t>
             </a:r>
           </a:p>
           <a:p>
@@ -624,25 +630,31 @@
           <a:p>
             <a:r>
               <a:rPr sz="1400"/>
-              <a:t>♪ MUSIQUE : Austin Wintory — Apotheosis (Journey)</a:t>
-            </a:r>
-          </a:p>
-          <a:p>
-            <a:r>
-              <a:rPr sz="1400"/>
-              <a:t>   Section : ~0:30 à la fin (~3:40)</a:t>
-            </a:r>
-          </a:p>
-          <a:p>
-            <a:r>
-              <a:rPr sz="1400"/>
-              <a:t>   Fichier : non embarqué</a:t>
-            </a:r>
-          </a:p>
-          <a:p>
-            <a:r>
-              <a:rPr sz="1400"/>
-              <a:t>   Départ  : ATTENTION : les 4 minutes de silence se jouent SANS musique. Tu lances quand la minuterie sonne.</a:t>
+              <a:t>♪ MUSIQUE — 3 pistes, à enchaîner dans l'ordre :</a:t>
+            </a:r>
+          </a:p>
+          <a:p>
+            <a:r>
+              <a:rPr sz="1400"/>
+              <a:t>   1. Apotheosis — Austin Wintory — Journey  (~3:40) [à télécharger]</a:t>
+            </a:r>
+          </a:p>
+          <a:p>
+            <a:r>
+              <a:rPr sz="1400"/>
+              <a:t>   2. Light of Nibel — Gareth Coker — Ori  (~4:00) [à télécharger]</a:t>
+            </a:r>
+          </a:p>
+          <a:p>
+            <a:r>
+              <a:rPr sz="1400"/>
+              <a:t>   3. BB's Theme — Ludvig Forssell — Death Stranding  (~4:00) [à télécharger]</a:t>
+            </a:r>
+          </a:p>
+          <a:p>
+            <a:r>
+              <a:rPr sz="1400"/>
+              <a:t>   Départ : ATTENTION : les 4 minutes de silence se jouent SANS musique. Lance quand la minuterie sonne.</a:t>
             </a:r>
           </a:p>
           <a:p/>
@@ -777,25 +789,31 @@
           <a:p>
             <a:r>
               <a:rPr sz="1400"/>
-              <a:t>♪ MUSIQUE : Ólafur Arnalds — Near Light (Living Room Songs)</a:t>
-            </a:r>
-          </a:p>
-          <a:p>
-            <a:r>
-              <a:rPr sz="1400"/>
-              <a:t>   Section : intégral, ~3:10</a:t>
-            </a:r>
-          </a:p>
-          <a:p>
-            <a:r>
-              <a:rPr sz="1400"/>
-              <a:t>   Fichier : non embarqué</a:t>
-            </a:r>
-          </a:p>
-          <a:p>
-            <a:r>
-              <a:rPr sz="1400"/>
-              <a:t>   Départ  : Sur la dernière image. Laisse-la FINIR avant de poser la question à Bumbur.</a:t>
+              <a:t>♪ MUSIQUE — 3 pistes, à enchaîner dans l'ordre :</a:t>
+            </a:r>
+          </a:p>
+          <a:p>
+            <a:r>
+              <a:rPr sz="1400"/>
+              <a:t>   1. Near Light — Ólafur Arnalds — Living Room Songs  (~3:10) [à télécharger]</a:t>
+            </a:r>
+          </a:p>
+          <a:p>
+            <a:r>
+              <a:rPr sz="1400"/>
+              <a:t>   2. Sweden — C418 — Minecraft  (~3:30) [à télécharger]</a:t>
+            </a:r>
+          </a:p>
+          <a:p>
+            <a:r>
+              <a:rPr sz="1400"/>
+              <a:t>   3. Hateno Village — Manaka Kataoka — Breath of the Wild  (~3:00) [à télécharger]</a:t>
+            </a:r>
+          </a:p>
+          <a:p>
+            <a:r>
+              <a:rPr sz="1400"/>
+              <a:t>   Départ : Sur la dernière image. Laisse-la FINIR avant de poser la question à Bumbur.</a:t>
             </a:r>
           </a:p>
           <a:p/>
@@ -995,25 +1013,31 @@
           <a:p>
             <a:r>
               <a:rPr sz="1400"/>
-              <a:t>♪ MUSIQUE : Nils Frahm — Ambre (Felt)</a:t>
-            </a:r>
-          </a:p>
-          <a:p>
-            <a:r>
-              <a:rPr sz="1400"/>
-              <a:t>   Section : intégral, ~4 min</a:t>
-            </a:r>
-          </a:p>
-          <a:p>
-            <a:r>
-              <a:rPr sz="1400"/>
-              <a:t>   Fichier : non embarqué</a:t>
-            </a:r>
-          </a:p>
-          <a:p>
-            <a:r>
-              <a:rPr sz="1400"/>
-              <a:t>   Départ  : Avant ta première phrase. COUPE NET quand la femelle décolle.</a:t>
+              <a:t>♪ MUSIQUE — 3 pistes, à enchaîner dans l'ordre :</a:t>
+            </a:r>
+          </a:p>
+          <a:p>
+            <a:r>
+              <a:rPr sz="1400"/>
+              <a:t>   1. Ambre — Nils Frahm — Felt  (~4:00) [à télécharger]</a:t>
+            </a:r>
+          </a:p>
+          <a:p>
+            <a:r>
+              <a:rPr sz="1400"/>
+              <a:t>   2. Subwoofer Lullaby — C418 — Minecraft  (~3:30) [à télécharger]</a:t>
+            </a:r>
+          </a:p>
+          <a:p>
+            <a:r>
+              <a:rPr sz="1400"/>
+              <a:t>   3. Only the Winds — Ólafur Arnalds  (~4:00) [à télécharger]</a:t>
+            </a:r>
+          </a:p>
+          <a:p>
+            <a:r>
+              <a:rPr sz="1400"/>
+              <a:t>   Départ : Avant ta première phrase. COUPE NET quand la femelle décolle.</a:t>
             </a:r>
           </a:p>
           <a:p/>
@@ -1148,25 +1172,31 @@
           <a:p>
             <a:r>
               <a:rPr sz="1400"/>
-              <a:t>♪ MUSIQUE : Jóhann Jóhannsson — Flight From the City (Orphée)</a:t>
-            </a:r>
-          </a:p>
-          <a:p>
-            <a:r>
-              <a:rPr sz="1400"/>
-              <a:t>   Section : ~0:00 à ~2:30, piano seul</a:t>
-            </a:r>
-          </a:p>
-          <a:p>
-            <a:r>
-              <a:rPr sz="1400"/>
-              <a:t>   Fichier : non embarqué</a:t>
-            </a:r>
-          </a:p>
-          <a:p>
-            <a:r>
-              <a:rPr sz="1400"/>
-              <a:t>   Départ  : Sur « La femelle ne touche plus le sol. » Pas avant.</a:t>
+              <a:t>♪ MUSIQUE — 3 pistes, à enchaîner dans l'ordre :</a:t>
+            </a:r>
+          </a:p>
+          <a:p>
+            <a:r>
+              <a:rPr sz="1400"/>
+              <a:t>   1. Flight From the City — Jóhann Jóhannsson — Orphée  (~6:20) [à télécharger]</a:t>
+            </a:r>
+          </a:p>
+          <a:p>
+            <a:r>
+              <a:rPr sz="1400"/>
+              <a:t>   2. Nascence — Austin Wintory — Journey  (~2:30) [à télécharger]</a:t>
+            </a:r>
+          </a:p>
+          <a:p>
+            <a:r>
+              <a:rPr sz="1400"/>
+              <a:t>   3. Adventure — Disasterpeace — Fez  (~3:00) [à télécharger]</a:t>
+            </a:r>
+          </a:p>
+          <a:p>
+            <a:r>
+              <a:rPr sz="1400"/>
+              <a:t>   Départ : Sur « La femelle ne touche plus le sol. » Pas avant.</a:t>
             </a:r>
           </a:p>
           <a:p/>
@@ -1301,25 +1331,31 @@
           <a:p>
             <a:r>
               <a:rPr sz="1400"/>
-              <a:t>♪ MUSIQUE : Brian Eno — An Ending (Ascent) (Apollo)</a:t>
-            </a:r>
-          </a:p>
-          <a:p>
-            <a:r>
-              <a:rPr sz="1400"/>
-              <a:t>   Section : intégral, ~4:25</a:t>
-            </a:r>
-          </a:p>
-          <a:p>
-            <a:r>
-              <a:rPr sz="1400"/>
-              <a:t>   Fichier : non embarqué</a:t>
-            </a:r>
-          </a:p>
-          <a:p>
-            <a:r>
-              <a:rPr sz="1400"/>
-              <a:t>   Départ  : Sur « Une ombre passe sous la coque. » LAISSE-LA FINIR dans le noir, ne parle pas dessus.</a:t>
+              <a:t>♪ MUSIQUE — 3 pistes, à enchaîner dans l'ordre :</a:t>
+            </a:r>
+          </a:p>
+          <a:p>
+            <a:r>
+              <a:rPr sz="1400"/>
+              <a:t>   1. An Ending (Ascent) — Brian Eno — Apollo  (~4:25) [à télécharger]</a:t>
+            </a:r>
+          </a:p>
+          <a:p>
+            <a:r>
+              <a:rPr sz="1400"/>
+              <a:t>   2. Cetus — Austin Wintory — Abzû  (~4:00) [à télécharger]</a:t>
+            </a:r>
+          </a:p>
+          <a:p>
+            <a:r>
+              <a:rPr sz="1400"/>
+              <a:t>   3. Travelers — Andrew Prahlow — Outer Wilds  (~3:00) [à télécharger]</a:t>
+            </a:r>
+          </a:p>
+          <a:p>
+            <a:r>
+              <a:rPr sz="1400"/>
+              <a:t>   Départ : Sur « Une ombre passe sous la coque. » LAISSE-LA FINIR dans le noir.</a:t>
             </a:r>
           </a:p>
           <a:p/>
@@ -1454,25 +1490,31 @@
           <a:p>
             <a:r>
               <a:rPr sz="1400"/>
-              <a:t>♪ MUSIQUE : Nils Frahm — Says (Spaces)</a:t>
-            </a:r>
-          </a:p>
-          <a:p>
-            <a:r>
-              <a:rPr sz="1400"/>
-              <a:t>   Section : ~0:00 à ~3:30 (jusqu'à ~6:00 si tu veux la montée)</a:t>
-            </a:r>
-          </a:p>
-          <a:p>
-            <a:r>
-              <a:rPr sz="1400"/>
-              <a:t>   Fichier : non embarqué</a:t>
-            </a:r>
-          </a:p>
-          <a:p>
-            <a:r>
-              <a:rPr sz="1400"/>
-              <a:t>   Départ  : Juste avant « Vous vous attendiez à du noir. » Laisse respirer plus longtemps qu'ailleurs.</a:t>
+              <a:t>♪ MUSIQUE — 3 pistes, à enchaîner dans l'ordre :</a:t>
+            </a:r>
+          </a:p>
+          <a:p>
+            <a:r>
+              <a:rPr sz="1400"/>
+              <a:t>   1. Says — Nils Frahm — Spaces  (~8:00) [à télécharger]</a:t>
+            </a:r>
+          </a:p>
+          <a:p>
+            <a:r>
+              <a:rPr sz="1400"/>
+              <a:t>   2. Dirtmouth — Christopher Larkin — Hollow Knight  (~2:30) [à télécharger]</a:t>
+            </a:r>
+          </a:p>
+          <a:p>
+            <a:r>
+              <a:rPr sz="1400"/>
+              <a:t>   3. Delphinus Delphis — Austin Wintory — Abzû  (~3:30) [à télécharger]</a:t>
+            </a:r>
+          </a:p>
+          <a:p>
+            <a:r>
+              <a:rPr sz="1400"/>
+              <a:t>   Départ : Juste avant « Vous vous attendiez à du noir. » Laisse respirer plus longtemps.</a:t>
             </a:r>
           </a:p>
           <a:p/>
@@ -1607,25 +1649,31 @@
           <a:p>
             <a:r>
               <a:rPr sz="1400"/>
-              <a:t>♪ MUSIQUE : Bonobo — Days to Come (album Days to Come)</a:t>
-            </a:r>
-          </a:p>
-          <a:p>
-            <a:r>
-              <a:rPr sz="1400"/>
-              <a:t>   Section : intégral, ~4:00</a:t>
-            </a:r>
-          </a:p>
-          <a:p>
-            <a:r>
-              <a:rPr sz="1400"/>
-              <a:t>   Fichier : non embarqué</a:t>
-            </a:r>
-          </a:p>
-          <a:p>
-            <a:r>
-              <a:rPr sz="1400"/>
-              <a:t>   Départ  : Dès le quartier commerçant. BAISSE DE MOITIÉ quand Bumbur fait son signe.</a:t>
+              <a:t>♪ MUSIQUE — 3 pistes, à enchaîner dans l'ordre :</a:t>
+            </a:r>
+          </a:p>
+          <a:p>
+            <a:r>
+              <a:rPr sz="1400"/>
+              <a:t>   1. Days to Come — Bonobo  (~4:00) [à télécharger]</a:t>
+            </a:r>
+          </a:p>
+          <a:p>
+            <a:r>
+              <a:rPr sz="1400"/>
+              <a:t>   2. Spiritfarer (Main Theme) — Max LL — Spiritfarer  (~3:00) [à télécharger]</a:t>
+            </a:r>
+          </a:p>
+          <a:p>
+            <a:r>
+              <a:rPr sz="1400"/>
+              <a:t>   3. Whirling-In-Rags, 8 AM — British Sea Power — Disco Elysium  (~4:00) [à télécharger]</a:t>
+            </a:r>
+          </a:p>
+          <a:p>
+            <a:r>
+              <a:rPr sz="1400"/>
+              <a:t>   Départ : Dès le quartier commerçant. BAISSE DE MOITIÉ quand Bumbur fait son signe.</a:t>
             </a:r>
           </a:p>
           <a:p/>
@@ -1772,25 +1820,31 @@
           <a:p>
             <a:r>
               <a:rPr sz="1400"/>
-              <a:t>♪ MUSIQUE : Jóhann Jóhannsson — The Cause of Labour Is the Hope of the World (The Miners' Hymns)</a:t>
-            </a:r>
-          </a:p>
-          <a:p>
-            <a:r>
-              <a:rPr sz="1400"/>
-              <a:t>   Section : intégral ~6 min, ou les 3 premières</a:t>
-            </a:r>
-          </a:p>
-          <a:p>
-            <a:r>
-              <a:rPr sz="1400"/>
-              <a:t>   Fichier : non embarqué</a:t>
-            </a:r>
-          </a:p>
-          <a:p>
-            <a:r>
-              <a:rPr sz="1400"/>
-              <a:t>   Départ  : En entrant dans la salle des roues. Coupe quand la négociation commence vraiment.</a:t>
+              <a:t>♪ MUSIQUE — 3 pistes, à enchaîner dans l'ordre :</a:t>
+            </a:r>
+          </a:p>
+          <a:p>
+            <a:r>
+              <a:rPr sz="1400"/>
+              <a:t>   1. The Cause of Labour… — Jóhann Jóhannsson — The Miners' Hymns  (~6:00) [à télécharger]</a:t>
+            </a:r>
+          </a:p>
+          <a:p>
+            <a:r>
+              <a:rPr sz="1400"/>
+              <a:t>   2. The City Must Survive — Piotr Musiał — Frostpunk  (~4:00) [à télécharger]</a:t>
+            </a:r>
+          </a:p>
+          <a:p>
+            <a:r>
+              <a:rPr sz="1400"/>
+              <a:t>   3. They Being Dead Yet Speaketh — Jóhann Jóhannsson  (~5:00) [à télécharger]</a:t>
+            </a:r>
+          </a:p>
+          <a:p>
+            <a:r>
+              <a:rPr sz="1400"/>
+              <a:t>   Départ : En entrant dans la salle des roues. Coupe quand la négociation commence.</a:t>
             </a:r>
           </a:p>
           <a:p/>
@@ -1925,25 +1979,31 @@
           <a:p>
             <a:r>
               <a:rPr sz="1400"/>
-              <a:t>♪ MUSIQUE : Max Richter — On the Nature of Daylight (The Blue Notebooks)</a:t>
-            </a:r>
-          </a:p>
-          <a:p>
-            <a:r>
-              <a:rPr sz="1400"/>
-              <a:t>   Section : intégral ~6:10, ou ~0:00 à ~3:30</a:t>
-            </a:r>
-          </a:p>
-          <a:p>
-            <a:r>
-              <a:rPr sz="1400"/>
-              <a:t>   Fichier : non embarqué</a:t>
-            </a:r>
-          </a:p>
-          <a:p>
-            <a:r>
-              <a:rPr sz="1400"/>
-              <a:t>   Départ  : Au moment où tu avances le marqueur d'une zone. Sans commentaire.</a:t>
+              <a:t>♪ MUSIQUE — 3 pistes, à enchaîner dans l'ordre :</a:t>
+            </a:r>
+          </a:p>
+          <a:p>
+            <a:r>
+              <a:rPr sz="1400"/>
+              <a:t>   1. On the Nature of Daylight — Max Richter  (~6:10) [à télécharger]</a:t>
+            </a:r>
+          </a:p>
+          <a:p>
+            <a:r>
+              <a:rPr sz="1400"/>
+              <a:t>   2. Prologue ~ To the Ancient Land — Kow Otani — Shadow of the Colossus  (~4:00) [à télécharger]</a:t>
+            </a:r>
+          </a:p>
+          <a:p>
+            <a:r>
+              <a:rPr sz="1400"/>
+              <a:t>   3. The Sacrifice — Gareth Coker — Ori  (~3:00) [à télécharger]</a:t>
+            </a:r>
+          </a:p>
+          <a:p>
+            <a:r>
+              <a:rPr sz="1400"/>
+              <a:t>   Départ : Au moment où tu avances le marqueur d'une zone. Sans commentaire.</a:t>
             </a:r>
           </a:p>
           <a:p/>
@@ -2078,25 +2138,31 @@
           <a:p>
             <a:r>
               <a:rPr sz="1400"/>
-              <a:t>♪ MUSIQUE : Jóhann Jóhannsson — The Sun's Gone Dim and the Sky's Turned Black (IBM 1401)</a:t>
-            </a:r>
-          </a:p>
-          <a:p>
-            <a:r>
-              <a:rPr sz="1400"/>
-              <a:t>   Section : ~0:00 à ~2:40</a:t>
-            </a:r>
-          </a:p>
-          <a:p>
-            <a:r>
-              <a:rPr sz="1400"/>
-              <a:t>   Fichier : non embarqué</a:t>
-            </a:r>
-          </a:p>
-          <a:p>
-            <a:r>
-              <a:rPr sz="1400"/>
-              <a:t>   Départ  : Quand Pagure annonce l'ordre du jour. COUPE BRUTALEMENT si un joueur nomme la cathédrale.</a:t>
+              <a:t>♪ MUSIQUE — 3 pistes, à enchaîner dans l'ordre :</a:t>
+            </a:r>
+          </a:p>
+          <a:p>
+            <a:r>
+              <a:rPr sz="1400"/>
+              <a:t>   1. The Sun's Gone Dim… — Jóhann Jóhannsson — IBM 1401  (~5:00) [à télécharger]</a:t>
+            </a:r>
+          </a:p>
+          <a:p>
+            <a:r>
+              <a:rPr sz="1400"/>
+              <a:t>   2. Papers, Please (Theme) — Lucas Pope  (~2:30) [à télécharger]</a:t>
+            </a:r>
+          </a:p>
+          <a:p>
+            <a:r>
+              <a:rPr sz="1400"/>
+              <a:t>   3. Resting Grounds — Christopher Larkin — Hollow Knight  (~3:00) [à télécharger]</a:t>
+            </a:r>
+          </a:p>
+          <a:p>
+            <a:r>
+              <a:rPr sz="1400"/>
+              <a:t>   Départ : Quand Pagure annonce l'ordre du jour. COUPE BRUTALEMENT si un joueur nomme la cathédrale.</a:t>
             </a:r>
           </a:p>
           <a:p/>
